--- a/marketing/campanhas/fabrica-de-analytics-q3-2026/Fabrica_Analytics_Q3_2026_Campanha.pptx
+++ b/marketing/campanhas/fabrica-de-analytics-q3-2026/Fabrica_Analytics_Q3_2026_Campanha.pptx
@@ -3356,7 +3356,7 @@
                   <a:srgbClr val="CCCCCC"/>
                 </a:solidFill>
               </a:rPr>
-              <a:t>Julho · Agosto · Setembro 2026  |  SAC / Datasphere por demanda</a:t>
+              <a:t>Julho · Agosto · Setembro 2026  |  Suporte e melhorias em SAC / Datasphere por demanda</a:t>
             </a:r>
           </a:p>
         </p:txBody>
@@ -3668,7 +3668,7 @@
             <a:avLst/>
           </a:prstGeom>
           <a:solidFill>
-            <a:srgbClr val="F5A800"/>
+            <a:srgbClr val="1A7A4A"/>
           </a:solidFill>
           <a:ln>
             <a:noFill/>
@@ -3725,8 +3725,8 @@
                   <a:srgbClr val="002F6C"/>
                 </a:solidFill>
               </a:rPr>
-              <a:t>SAC contratado,
-não utilizado</a:t>
+              <a:t>Sem parceiro
+para suportar SAC</a:t>
             </a:r>
           </a:p>
         </p:txBody>
@@ -3741,6 +3741,204 @@
           <a:xfrm>
             <a:off x="475488" y="2121408"/>
             <a:ext cx="2523744" cy="45720"/>
+          </a:xfrm>
+          <a:prstGeom prst="rect">
+            <a:avLst/>
+          </a:prstGeom>
+          <a:solidFill>
+            <a:srgbClr val="1A7A4A"/>
+          </a:solidFill>
+          <a:ln>
+            <a:noFill/>
+          </a:ln>
+        </p:spPr>
+        <p:style>
+          <a:lnRef idx="1">
+            <a:schemeClr val="accent1"/>
+          </a:lnRef>
+          <a:fillRef idx="3">
+            <a:schemeClr val="accent1"/>
+          </a:fillRef>
+          <a:effectRef idx="2">
+            <a:schemeClr val="accent1"/>
+          </a:effectRef>
+          <a:fontRef idx="minor">
+            <a:schemeClr val="lt1"/>
+          </a:fontRef>
+        </p:style>
+        <p:txBody>
+          <a:bodyPr rtlCol="0" anchor="ctr"/>
+          <a:lstStyle/>
+          <a:p>
+            <a:pPr algn="ctr"/>
+          </a:p>
+        </p:txBody>
+      </p:sp>
+      <p:sp>
+        <p:nvSpPr>
+          <p:cNvPr id="11" name="TextBox 10"/>
+          <p:cNvSpPr txBox="1"/>
+          <p:nvPr/>
+        </p:nvSpPr>
+        <p:spPr>
+          <a:xfrm>
+            <a:off x="475488" y="2212848"/>
+            <a:ext cx="2523744" cy="2286000"/>
+          </a:xfrm>
+          <a:prstGeom prst="rect">
+            <a:avLst/>
+          </a:prstGeom>
+          <a:noFill/>
+        </p:spPr>
+        <p:txBody>
+          <a:bodyPr wrap="square">
+            <a:spAutoFit/>
+          </a:bodyPr>
+          <a:lstStyle/>
+          <a:p>
+            <a:pPr algn="l"/>
+            <a:r>
+              <a:rPr sz="1000" b="0" i="1">
+                <a:solidFill>
+                  <a:srgbClr val="444444"/>
+                </a:solidFill>
+              </a:rPr>
+              <a:t>"a gente queria uma empresa para dar suporte
+nessa passagem de conhecimento"</a:t>
+            </a:r>
+          </a:p>
+        </p:txBody>
+      </p:sp>
+      <p:sp>
+        <p:nvSpPr>
+          <p:cNvPr id="12" name="Rectangle 11"/>
+          <p:cNvSpPr/>
+          <p:nvPr/>
+        </p:nvSpPr>
+        <p:spPr>
+          <a:xfrm>
+            <a:off x="475488" y="4937760"/>
+            <a:ext cx="2523744" cy="457200"/>
+          </a:xfrm>
+          <a:prstGeom prst="rect">
+            <a:avLst/>
+          </a:prstGeom>
+          <a:solidFill>
+            <a:srgbClr val="1A7A4A"/>
+          </a:solidFill>
+          <a:ln>
+            <a:noFill/>
+          </a:ln>
+        </p:spPr>
+        <p:style>
+          <a:lnRef idx="1">
+            <a:schemeClr val="accent1"/>
+          </a:lnRef>
+          <a:fillRef idx="3">
+            <a:schemeClr val="accent1"/>
+          </a:fillRef>
+          <a:effectRef idx="2">
+            <a:schemeClr val="accent1"/>
+          </a:effectRef>
+          <a:fontRef idx="minor">
+            <a:schemeClr val="lt1"/>
+          </a:fontRef>
+        </p:style>
+        <p:txBody>
+          <a:bodyPr rtlCol="0" anchor="ctr"/>
+          <a:lstStyle/>
+          <a:p>
+            <a:pPr algn="ctr"/>
+          </a:p>
+        </p:txBody>
+      </p:sp>
+      <p:sp>
+        <p:nvSpPr>
+          <p:cNvPr id="13" name="TextBox 12"/>
+          <p:cNvSpPr txBox="1"/>
+          <p:nvPr/>
+        </p:nvSpPr>
+        <p:spPr>
+          <a:xfrm>
+            <a:off x="475488" y="4937760"/>
+            <a:ext cx="2523744" cy="457200"/>
+          </a:xfrm>
+          <a:prstGeom prst="rect">
+            <a:avLst/>
+          </a:prstGeom>
+          <a:noFill/>
+        </p:spPr>
+        <p:txBody>
+          <a:bodyPr wrap="square">
+            <a:spAutoFit/>
+          </a:bodyPr>
+          <a:lstStyle/>
+          <a:p>
+            <a:pPr algn="ctr"/>
+            <a:r>
+              <a:rPr sz="1300" b="1" i="0">
+                <a:solidFill>
+                  <a:srgbClr val="FFFFFF"/>
+                </a:solidFill>
+              </a:rPr>
+              <a:t>DOR CENTRAL</a:t>
+            </a:r>
+          </a:p>
+        </p:txBody>
+      </p:sp>
+      <p:sp>
+        <p:nvSpPr>
+          <p:cNvPr id="14" name="Rectangle 13"/>
+          <p:cNvSpPr/>
+          <p:nvPr/>
+        </p:nvSpPr>
+        <p:spPr>
+          <a:xfrm>
+            <a:off x="3310128" y="1325880"/>
+            <a:ext cx="2743200" cy="4389120"/>
+          </a:xfrm>
+          <a:prstGeom prst="rect">
+            <a:avLst/>
+          </a:prstGeom>
+          <a:solidFill>
+            <a:srgbClr val="E8F0FE"/>
+          </a:solidFill>
+          <a:ln>
+            <a:noFill/>
+          </a:ln>
+        </p:spPr>
+        <p:style>
+          <a:lnRef idx="1">
+            <a:schemeClr val="accent1"/>
+          </a:lnRef>
+          <a:fillRef idx="3">
+            <a:schemeClr val="accent1"/>
+          </a:fillRef>
+          <a:effectRef idx="2">
+            <a:schemeClr val="accent1"/>
+          </a:effectRef>
+          <a:fontRef idx="minor">
+            <a:schemeClr val="lt1"/>
+          </a:fontRef>
+        </p:style>
+        <p:txBody>
+          <a:bodyPr rtlCol="0" anchor="ctr"/>
+          <a:lstStyle/>
+          <a:p>
+            <a:pPr algn="ctr"/>
+          </a:p>
+        </p:txBody>
+      </p:sp>
+      <p:sp>
+        <p:nvSpPr>
+          <p:cNvPr id="15" name="Rectangle 14"/>
+          <p:cNvSpPr/>
+          <p:nvPr/>
+        </p:nvSpPr>
+        <p:spPr>
+          <a:xfrm>
+            <a:off x="3310128" y="1325880"/>
+            <a:ext cx="2743200" cy="73152"/>
           </a:xfrm>
           <a:prstGeom prst="rect">
             <a:avLst/>
@@ -3776,14 +3974,14 @@
       </p:sp>
       <p:sp>
         <p:nvSpPr>
-          <p:cNvPr id="11" name="TextBox 10"/>
-          <p:cNvSpPr txBox="1"/>
-          <p:nvPr/>
-        </p:nvSpPr>
-        <p:spPr>
-          <a:xfrm>
-            <a:off x="475488" y="2212848"/>
-            <a:ext cx="2523744" cy="2286000"/>
+          <p:cNvPr id="16" name="TextBox 15"/>
+          <p:cNvSpPr txBox="1"/>
+          <p:nvPr/>
+        </p:nvSpPr>
+        <p:spPr>
+          <a:xfrm>
+            <a:off x="3419856" y="1417320"/>
+            <a:ext cx="2523744" cy="685800"/>
           </a:xfrm>
           <a:prstGeom prst="rect">
             <a:avLst/>
@@ -3798,27 +3996,27 @@
           <a:p>
             <a:pPr algn="l"/>
             <a:r>
-              <a:rPr sz="1000" b="0" i="1">
-                <a:solidFill>
-                  <a:srgbClr val="444444"/>
-                </a:solidFill>
-              </a:rPr>
-              <a:t>"tentamos usar, não foi muito bem aceito"
-"temos licenciamento... não chegamos a evoluir"</a:t>
-            </a:r>
-          </a:p>
-        </p:txBody>
-      </p:sp>
-      <p:sp>
-        <p:nvSpPr>
-          <p:cNvPr id="12" name="Rectangle 11"/>
+              <a:rPr sz="1200" b="1" i="0">
+                <a:solidFill>
+                  <a:srgbClr val="002F6C"/>
+                </a:solidFill>
+              </a:rPr>
+              <a:t>SAC contratado,
+sem suporte p/ ativar</a:t>
+            </a:r>
+          </a:p>
+        </p:txBody>
+      </p:sp>
+      <p:sp>
+        <p:nvSpPr>
+          <p:cNvPr id="17" name="Rectangle 16"/>
           <p:cNvSpPr/>
           <p:nvPr/>
         </p:nvSpPr>
         <p:spPr>
           <a:xfrm>
-            <a:off x="475488" y="4937760"/>
-            <a:ext cx="2523744" cy="457200"/>
+            <a:off x="3419856" y="2121408"/>
+            <a:ext cx="2523744" cy="45720"/>
           </a:xfrm>
           <a:prstGeom prst="rect">
             <a:avLst/>
@@ -3854,18 +4052,96 @@
       </p:sp>
       <p:sp>
         <p:nvSpPr>
-          <p:cNvPr id="13" name="TextBox 12"/>
-          <p:cNvSpPr txBox="1"/>
-          <p:nvPr/>
-        </p:nvSpPr>
-        <p:spPr>
-          <a:xfrm>
-            <a:off x="475488" y="4937760"/>
+          <p:cNvPr id="18" name="TextBox 17"/>
+          <p:cNvSpPr txBox="1"/>
+          <p:nvPr/>
+        </p:nvSpPr>
+        <p:spPr>
+          <a:xfrm>
+            <a:off x="3419856" y="2212848"/>
+            <a:ext cx="2523744" cy="2286000"/>
+          </a:xfrm>
+          <a:prstGeom prst="rect">
+            <a:avLst/>
+          </a:prstGeom>
+          <a:noFill/>
+        </p:spPr>
+        <p:txBody>
+          <a:bodyPr wrap="square">
+            <a:spAutoFit/>
+          </a:bodyPr>
+          <a:lstStyle/>
+          <a:p>
+            <a:pPr algn="l"/>
+            <a:r>
+              <a:rPr sz="1000" b="0" i="1">
+                <a:solidFill>
+                  <a:srgbClr val="444444"/>
+                </a:solidFill>
+              </a:rPr>
+              <a:t>"tentamos usar, não foi muito bem aceito"
+"temos licenciamento... não chegamos a evoluir"</a:t>
+            </a:r>
+          </a:p>
+        </p:txBody>
+      </p:sp>
+      <p:sp>
+        <p:nvSpPr>
+          <p:cNvPr id="19" name="Rectangle 18"/>
+          <p:cNvSpPr/>
+          <p:nvPr/>
+        </p:nvSpPr>
+        <p:spPr>
+          <a:xfrm>
+            <a:off x="3419856" y="4937760"/>
             <a:ext cx="2523744" cy="457200"/>
           </a:xfrm>
           <a:prstGeom prst="rect">
             <a:avLst/>
           </a:prstGeom>
+          <a:solidFill>
+            <a:srgbClr val="F5A800"/>
+          </a:solidFill>
+          <a:ln>
+            <a:noFill/>
+          </a:ln>
+        </p:spPr>
+        <p:style>
+          <a:lnRef idx="1">
+            <a:schemeClr val="accent1"/>
+          </a:lnRef>
+          <a:fillRef idx="3">
+            <a:schemeClr val="accent1"/>
+          </a:fillRef>
+          <a:effectRef idx="2">
+            <a:schemeClr val="accent1"/>
+          </a:effectRef>
+          <a:fontRef idx="minor">
+            <a:schemeClr val="lt1"/>
+          </a:fontRef>
+        </p:style>
+        <p:txBody>
+          <a:bodyPr rtlCol="0" anchor="ctr"/>
+          <a:lstStyle/>
+          <a:p>
+            <a:pPr algn="ctr"/>
+          </a:p>
+        </p:txBody>
+      </p:sp>
+      <p:sp>
+        <p:nvSpPr>
+          <p:cNvPr id="20" name="TextBox 19"/>
+          <p:cNvSpPr txBox="1"/>
+          <p:nvPr/>
+        </p:nvSpPr>
+        <p:spPr>
+          <a:xfrm>
+            <a:off x="3419856" y="4937760"/>
+            <a:ext cx="2523744" cy="457200"/>
+          </a:xfrm>
+          <a:prstGeom prst="rect">
+            <a:avLst/>
+          </a:prstGeom>
           <a:noFill/>
         </p:spPr>
         <p:txBody>
@@ -3888,13 +4164,13 @@
       </p:sp>
       <p:sp>
         <p:nvSpPr>
-          <p:cNvPr id="14" name="Rectangle 13"/>
+          <p:cNvPr id="21" name="Rectangle 20"/>
           <p:cNvSpPr/>
           <p:nvPr/>
         </p:nvSpPr>
         <p:spPr>
           <a:xfrm>
-            <a:off x="3310128" y="1325880"/>
+            <a:off x="6254496" y="1325880"/>
             <a:ext cx="2743200" cy="4389120"/>
           </a:xfrm>
           <a:prstGeom prst="rect">
@@ -3931,13 +4207,13 @@
       </p:sp>
       <p:sp>
         <p:nvSpPr>
-          <p:cNvPr id="15" name="Rectangle 14"/>
+          <p:cNvPr id="22" name="Rectangle 21"/>
           <p:cNvSpPr/>
           <p:nvPr/>
         </p:nvSpPr>
         <p:spPr>
           <a:xfrm>
-            <a:off x="3310128" y="1325880"/>
+            <a:off x="6254496" y="1325880"/>
             <a:ext cx="2743200" cy="73152"/>
           </a:xfrm>
           <a:prstGeom prst="rect">
@@ -3974,13 +4250,13 @@
       </p:sp>
       <p:sp>
         <p:nvSpPr>
-          <p:cNvPr id="16" name="TextBox 15"/>
-          <p:cNvSpPr txBox="1"/>
-          <p:nvPr/>
-        </p:nvSpPr>
-        <p:spPr>
-          <a:xfrm>
-            <a:off x="3419856" y="1417320"/>
+          <p:cNvPr id="23" name="TextBox 22"/>
+          <p:cNvSpPr txBox="1"/>
+          <p:nvPr/>
+        </p:nvSpPr>
+        <p:spPr>
+          <a:xfrm>
+            <a:off x="6364224" y="1417320"/>
             <a:ext cx="2523744" cy="685800"/>
           </a:xfrm>
           <a:prstGeom prst="rect">
@@ -4009,13 +4285,13 @@
       </p:sp>
       <p:sp>
         <p:nvSpPr>
-          <p:cNvPr id="17" name="Rectangle 16"/>
+          <p:cNvPr id="24" name="Rectangle 23"/>
           <p:cNvSpPr/>
           <p:nvPr/>
         </p:nvSpPr>
         <p:spPr>
           <a:xfrm>
-            <a:off x="3419856" y="2121408"/>
+            <a:off x="6364224" y="2121408"/>
             <a:ext cx="2523744" cy="45720"/>
           </a:xfrm>
           <a:prstGeom prst="rect">
@@ -4052,13 +4328,13 @@
       </p:sp>
       <p:sp>
         <p:nvSpPr>
-          <p:cNvPr id="18" name="TextBox 17"/>
-          <p:cNvSpPr txBox="1"/>
-          <p:nvPr/>
-        </p:nvSpPr>
-        <p:spPr>
-          <a:xfrm>
-            <a:off x="3419856" y="2212848"/>
+          <p:cNvPr id="25" name="TextBox 24"/>
+          <p:cNvSpPr txBox="1"/>
+          <p:nvPr/>
+        </p:nvSpPr>
+        <p:spPr>
+          <a:xfrm>
+            <a:off x="6364224" y="2212848"/>
             <a:ext cx="2523744" cy="2286000"/>
           </a:xfrm>
           <a:prstGeom prst="rect">
@@ -4087,13 +4363,13 @@
       </p:sp>
       <p:sp>
         <p:nvSpPr>
-          <p:cNvPr id="19" name="Rectangle 18"/>
+          <p:cNvPr id="26" name="Rectangle 25"/>
           <p:cNvSpPr/>
           <p:nvPr/>
         </p:nvSpPr>
         <p:spPr>
           <a:xfrm>
-            <a:off x="3419856" y="4937760"/>
+            <a:off x="6364224" y="4937760"/>
             <a:ext cx="2523744" cy="457200"/>
           </a:xfrm>
           <a:prstGeom prst="rect">
@@ -4130,13 +4406,13 @@
       </p:sp>
       <p:sp>
         <p:nvSpPr>
-          <p:cNvPr id="20" name="TextBox 19"/>
-          <p:cNvSpPr txBox="1"/>
-          <p:nvPr/>
-        </p:nvSpPr>
-        <p:spPr>
-          <a:xfrm>
-            <a:off x="3419856" y="4937760"/>
+          <p:cNvPr id="27" name="TextBox 26"/>
+          <p:cNvSpPr txBox="1"/>
+          <p:nvPr/>
+        </p:nvSpPr>
+        <p:spPr>
+          <a:xfrm>
+            <a:off x="6364224" y="4937760"/>
             <a:ext cx="2523744" cy="457200"/>
           </a:xfrm>
           <a:prstGeom prst="rect">
@@ -4164,13 +4440,13 @@
       </p:sp>
       <p:sp>
         <p:nvSpPr>
-          <p:cNvPr id="21" name="Rectangle 20"/>
+          <p:cNvPr id="28" name="Rectangle 27"/>
           <p:cNvSpPr/>
           <p:nvPr/>
         </p:nvSpPr>
         <p:spPr>
           <a:xfrm>
-            <a:off x="6254496" y="1325880"/>
+            <a:off x="9198864" y="1325880"/>
             <a:ext cx="2743200" cy="4389120"/>
           </a:xfrm>
           <a:prstGeom prst="rect">
@@ -4207,13 +4483,13 @@
       </p:sp>
       <p:sp>
         <p:nvSpPr>
-          <p:cNvPr id="22" name="Rectangle 21"/>
+          <p:cNvPr id="29" name="Rectangle 28"/>
           <p:cNvSpPr/>
           <p:nvPr/>
         </p:nvSpPr>
         <p:spPr>
           <a:xfrm>
-            <a:off x="6254496" y="1325880"/>
+            <a:off x="9198864" y="1325880"/>
             <a:ext cx="2743200" cy="73152"/>
           </a:xfrm>
           <a:prstGeom prst="rect">
@@ -4250,13 +4526,13 @@
       </p:sp>
       <p:sp>
         <p:nvSpPr>
-          <p:cNvPr id="23" name="TextBox 22"/>
-          <p:cNvSpPr txBox="1"/>
-          <p:nvPr/>
-        </p:nvSpPr>
-        <p:spPr>
-          <a:xfrm>
-            <a:off x="6364224" y="1417320"/>
+          <p:cNvPr id="30" name="TextBox 29"/>
+          <p:cNvSpPr txBox="1"/>
+          <p:nvPr/>
+        </p:nvSpPr>
+        <p:spPr>
+          <a:xfrm>
+            <a:off x="9308592" y="1417320"/>
             <a:ext cx="2523744" cy="685800"/>
           </a:xfrm>
           <a:prstGeom prst="rect">
@@ -4278,20 +4554,20 @@
                 </a:solidFill>
               </a:rPr>
               <a:t>S4 sobrecarregado
-com relatórios</a:t>
-            </a:r>
-          </a:p>
-        </p:txBody>
-      </p:sp>
-      <p:sp>
-        <p:nvSpPr>
-          <p:cNvPr id="24" name="Rectangle 23"/>
+precisa ser otimizado</a:t>
+            </a:r>
+          </a:p>
+        </p:txBody>
+      </p:sp>
+      <p:sp>
+        <p:nvSpPr>
+          <p:cNvPr id="31" name="Rectangle 30"/>
           <p:cNvSpPr/>
           <p:nvPr/>
         </p:nvSpPr>
         <p:spPr>
           <a:xfrm>
-            <a:off x="6364224" y="2121408"/>
+            <a:off x="9308592" y="2121408"/>
             <a:ext cx="2523744" cy="45720"/>
           </a:xfrm>
           <a:prstGeom prst="rect">
@@ -4328,13 +4604,13 @@
       </p:sp>
       <p:sp>
         <p:nvSpPr>
-          <p:cNvPr id="25" name="TextBox 24"/>
-          <p:cNvSpPr txBox="1"/>
-          <p:nvPr/>
-        </p:nvSpPr>
-        <p:spPr>
-          <a:xfrm>
-            <a:off x="6364224" y="2212848"/>
+          <p:cNvPr id="32" name="TextBox 31"/>
+          <p:cNvSpPr txBox="1"/>
+          <p:nvPr/>
+        </p:nvSpPr>
+        <p:spPr>
+          <a:xfrm>
+            <a:off x="9308592" y="2212848"/>
             <a:ext cx="2523744" cy="2286000"/>
           </a:xfrm>
           <a:prstGeom prst="rect">
@@ -4363,13 +4639,13 @@
       </p:sp>
       <p:sp>
         <p:nvSpPr>
-          <p:cNvPr id="26" name="Rectangle 25"/>
+          <p:cNvPr id="33" name="Rectangle 32"/>
           <p:cNvSpPr/>
           <p:nvPr/>
         </p:nvSpPr>
         <p:spPr>
           <a:xfrm>
-            <a:off x="6364224" y="4937760"/>
+            <a:off x="9308592" y="4937760"/>
             <a:ext cx="2523744" cy="457200"/>
           </a:xfrm>
           <a:prstGeom prst="rect">
@@ -4377,282 +4653,6 @@
           </a:prstGeom>
           <a:solidFill>
             <a:srgbClr val="002F6C"/>
-          </a:solidFill>
-          <a:ln>
-            <a:noFill/>
-          </a:ln>
-        </p:spPr>
-        <p:style>
-          <a:lnRef idx="1">
-            <a:schemeClr val="accent1"/>
-          </a:lnRef>
-          <a:fillRef idx="3">
-            <a:schemeClr val="accent1"/>
-          </a:fillRef>
-          <a:effectRef idx="2">
-            <a:schemeClr val="accent1"/>
-          </a:effectRef>
-          <a:fontRef idx="minor">
-            <a:schemeClr val="lt1"/>
-          </a:fontRef>
-        </p:style>
-        <p:txBody>
-          <a:bodyPr rtlCol="0" anchor="ctr"/>
-          <a:lstStyle/>
-          <a:p>
-            <a:pPr algn="ctr"/>
-          </a:p>
-        </p:txBody>
-      </p:sp>
-      <p:sp>
-        <p:nvSpPr>
-          <p:cNvPr id="27" name="TextBox 26"/>
-          <p:cNvSpPr txBox="1"/>
-          <p:nvPr/>
-        </p:nvSpPr>
-        <p:spPr>
-          <a:xfrm>
-            <a:off x="6364224" y="4937760"/>
-            <a:ext cx="2523744" cy="457200"/>
-          </a:xfrm>
-          <a:prstGeom prst="rect">
-            <a:avLst/>
-          </a:prstGeom>
-          <a:noFill/>
-        </p:spPr>
-        <p:txBody>
-          <a:bodyPr wrap="square">
-            <a:spAutoFit/>
-          </a:bodyPr>
-          <a:lstStyle/>
-          <a:p>
-            <a:pPr algn="ctr"/>
-            <a:r>
-              <a:rPr sz="1300" b="1" i="0">
-                <a:solidFill>
-                  <a:srgbClr val="FFFFFF"/>
-                </a:solidFill>
-              </a:rPr>
-              <a:t>3 reuniões</a:t>
-            </a:r>
-          </a:p>
-        </p:txBody>
-      </p:sp>
-      <p:sp>
-        <p:nvSpPr>
-          <p:cNvPr id="28" name="Rectangle 27"/>
-          <p:cNvSpPr/>
-          <p:nvPr/>
-        </p:nvSpPr>
-        <p:spPr>
-          <a:xfrm>
-            <a:off x="9198864" y="1325880"/>
-            <a:ext cx="2743200" cy="4389120"/>
-          </a:xfrm>
-          <a:prstGeom prst="rect">
-            <a:avLst/>
-          </a:prstGeom>
-          <a:solidFill>
-            <a:srgbClr val="E8F0FE"/>
-          </a:solidFill>
-          <a:ln>
-            <a:noFill/>
-          </a:ln>
-        </p:spPr>
-        <p:style>
-          <a:lnRef idx="1">
-            <a:schemeClr val="accent1"/>
-          </a:lnRef>
-          <a:fillRef idx="3">
-            <a:schemeClr val="accent1"/>
-          </a:fillRef>
-          <a:effectRef idx="2">
-            <a:schemeClr val="accent1"/>
-          </a:effectRef>
-          <a:fontRef idx="minor">
-            <a:schemeClr val="lt1"/>
-          </a:fontRef>
-        </p:style>
-        <p:txBody>
-          <a:bodyPr rtlCol="0" anchor="ctr"/>
-          <a:lstStyle/>
-          <a:p>
-            <a:pPr algn="ctr"/>
-          </a:p>
-        </p:txBody>
-      </p:sp>
-      <p:sp>
-        <p:nvSpPr>
-          <p:cNvPr id="29" name="Rectangle 28"/>
-          <p:cNvSpPr/>
-          <p:nvPr/>
-        </p:nvSpPr>
-        <p:spPr>
-          <a:xfrm>
-            <a:off x="9198864" y="1325880"/>
-            <a:ext cx="2743200" cy="73152"/>
-          </a:xfrm>
-          <a:prstGeom prst="rect">
-            <a:avLst/>
-          </a:prstGeom>
-          <a:solidFill>
-            <a:srgbClr val="1A7A4A"/>
-          </a:solidFill>
-          <a:ln>
-            <a:noFill/>
-          </a:ln>
-        </p:spPr>
-        <p:style>
-          <a:lnRef idx="1">
-            <a:schemeClr val="accent1"/>
-          </a:lnRef>
-          <a:fillRef idx="3">
-            <a:schemeClr val="accent1"/>
-          </a:fillRef>
-          <a:effectRef idx="2">
-            <a:schemeClr val="accent1"/>
-          </a:effectRef>
-          <a:fontRef idx="minor">
-            <a:schemeClr val="lt1"/>
-          </a:fontRef>
-        </p:style>
-        <p:txBody>
-          <a:bodyPr rtlCol="0" anchor="ctr"/>
-          <a:lstStyle/>
-          <a:p>
-            <a:pPr algn="ctr"/>
-          </a:p>
-        </p:txBody>
-      </p:sp>
-      <p:sp>
-        <p:nvSpPr>
-          <p:cNvPr id="30" name="TextBox 29"/>
-          <p:cNvSpPr txBox="1"/>
-          <p:nvPr/>
-        </p:nvSpPr>
-        <p:spPr>
-          <a:xfrm>
-            <a:off x="9308592" y="1417320"/>
-            <a:ext cx="2523744" cy="685800"/>
-          </a:xfrm>
-          <a:prstGeom prst="rect">
-            <a:avLst/>
-          </a:prstGeom>
-          <a:noFill/>
-        </p:spPr>
-        <p:txBody>
-          <a:bodyPr wrap="square">
-            <a:spAutoFit/>
-          </a:bodyPr>
-          <a:lstStyle/>
-          <a:p>
-            <a:pPr algn="l"/>
-            <a:r>
-              <a:rPr sz="1200" b="1" i="0">
-                <a:solidFill>
-                  <a:srgbClr val="002F6C"/>
-                </a:solidFill>
-              </a:rPr>
-              <a:t>Capacidade técnica
-interna insuficiente</a:t>
-            </a:r>
-          </a:p>
-        </p:txBody>
-      </p:sp>
-      <p:sp>
-        <p:nvSpPr>
-          <p:cNvPr id="31" name="Rectangle 30"/>
-          <p:cNvSpPr/>
-          <p:nvPr/>
-        </p:nvSpPr>
-        <p:spPr>
-          <a:xfrm>
-            <a:off x="9308592" y="2121408"/>
-            <a:ext cx="2523744" cy="45720"/>
-          </a:xfrm>
-          <a:prstGeom prst="rect">
-            <a:avLst/>
-          </a:prstGeom>
-          <a:solidFill>
-            <a:srgbClr val="1A7A4A"/>
-          </a:solidFill>
-          <a:ln>
-            <a:noFill/>
-          </a:ln>
-        </p:spPr>
-        <p:style>
-          <a:lnRef idx="1">
-            <a:schemeClr val="accent1"/>
-          </a:lnRef>
-          <a:fillRef idx="3">
-            <a:schemeClr val="accent1"/>
-          </a:fillRef>
-          <a:effectRef idx="2">
-            <a:schemeClr val="accent1"/>
-          </a:effectRef>
-          <a:fontRef idx="minor">
-            <a:schemeClr val="lt1"/>
-          </a:fontRef>
-        </p:style>
-        <p:txBody>
-          <a:bodyPr rtlCol="0" anchor="ctr"/>
-          <a:lstStyle/>
-          <a:p>
-            <a:pPr algn="ctr"/>
-          </a:p>
-        </p:txBody>
-      </p:sp>
-      <p:sp>
-        <p:nvSpPr>
-          <p:cNvPr id="32" name="TextBox 31"/>
-          <p:cNvSpPr txBox="1"/>
-          <p:nvPr/>
-        </p:nvSpPr>
-        <p:spPr>
-          <a:xfrm>
-            <a:off x="9308592" y="2212848"/>
-            <a:ext cx="2523744" cy="2286000"/>
-          </a:xfrm>
-          <a:prstGeom prst="rect">
-            <a:avLst/>
-          </a:prstGeom>
-          <a:noFill/>
-        </p:spPr>
-        <p:txBody>
-          <a:bodyPr wrap="square">
-            <a:spAutoFit/>
-          </a:bodyPr>
-          <a:lstStyle/>
-          <a:p>
-            <a:pPr algn="l"/>
-            <a:r>
-              <a:rPr sz="1000" b="0" i="1">
-                <a:solidFill>
-                  <a:srgbClr val="444444"/>
-                </a:solidFill>
-              </a:rPr>
-              <a:t>"a gente queria uma empresa para dar suporte
-nessa passagem de conhecimento"</a:t>
-            </a:r>
-          </a:p>
-        </p:txBody>
-      </p:sp>
-      <p:sp>
-        <p:nvSpPr>
-          <p:cNvPr id="33" name="Rectangle 32"/>
-          <p:cNvSpPr/>
-          <p:nvPr/>
-        </p:nvSpPr>
-        <p:spPr>
-          <a:xfrm>
-            <a:off x="9308592" y="4937760"/>
-            <a:ext cx="2523744" cy="457200"/>
-          </a:xfrm>
-          <a:prstGeom prst="rect">
-            <a:avLst/>
-          </a:prstGeom>
-          <a:solidFill>
-            <a:srgbClr val="1A7A4A"/>
           </a:solidFill>
           <a:ln>
             <a:noFill/>
@@ -6237,7 +6237,7 @@
             <a:avLst/>
           </a:prstGeom>
           <a:solidFill>
-            <a:srgbClr val="F5A800"/>
+            <a:srgbClr val="1A7A4A"/>
           </a:solidFill>
           <a:ln>
             <a:noFill/>
@@ -6291,7 +6291,7 @@
             <a:r>
               <a:rPr sz="2000" b="1" i="0">
                 <a:solidFill>
-                  <a:srgbClr val="002F6C"/>
+                  <a:srgbClr val="FFFFFF"/>
                 </a:solidFill>
               </a:rPr>
               <a:t>01</a:t>
@@ -6328,7 +6328,7 @@
                   <a:srgbClr val="002F6C"/>
                 </a:solidFill>
               </a:rPr>
-              <a:t>SAC Parado</a:t>
+              <a:t>Sem parceiro técnico</a:t>
             </a:r>
           </a:p>
         </p:txBody>
@@ -6343,6 +6343,126 @@
           <a:xfrm>
             <a:off x="1143000" y="1645920"/>
             <a:ext cx="4572000" cy="45720"/>
+          </a:xfrm>
+          <a:prstGeom prst="rect">
+            <a:avLst/>
+          </a:prstGeom>
+          <a:solidFill>
+            <a:srgbClr val="1A7A4A"/>
+          </a:solidFill>
+          <a:ln>
+            <a:noFill/>
+          </a:ln>
+        </p:spPr>
+        <p:style>
+          <a:lnRef idx="1">
+            <a:schemeClr val="accent1"/>
+          </a:lnRef>
+          <a:fillRef idx="3">
+            <a:schemeClr val="accent1"/>
+          </a:fillRef>
+          <a:effectRef idx="2">
+            <a:schemeClr val="accent1"/>
+          </a:effectRef>
+          <a:fontRef idx="minor">
+            <a:schemeClr val="lt1"/>
+          </a:fontRef>
+        </p:style>
+        <p:txBody>
+          <a:bodyPr rtlCol="0" anchor="ctr"/>
+          <a:lstStyle/>
+          <a:p>
+            <a:pPr algn="ctr"/>
+          </a:p>
+        </p:txBody>
+      </p:sp>
+      <p:sp>
+        <p:nvSpPr>
+          <p:cNvPr id="11" name="TextBox 10"/>
+          <p:cNvSpPr txBox="1"/>
+          <p:nvPr/>
+        </p:nvSpPr>
+        <p:spPr>
+          <a:xfrm>
+            <a:off x="1143000" y="1783080"/>
+            <a:ext cx="4572000" cy="1737360"/>
+          </a:xfrm>
+          <a:prstGeom prst="rect">
+            <a:avLst/>
+          </a:prstGeom>
+          <a:noFill/>
+        </p:spPr>
+        <p:txBody>
+          <a:bodyPr wrap="square">
+            <a:spAutoFit/>
+          </a:bodyPr>
+          <a:lstStyle/>
+          <a:p>
+            <a:pPr algn="l"/>
+            <a:r>
+              <a:rPr sz="1100" b="0" i="1">
+                <a:solidFill>
+                  <a:srgbClr val="444444"/>
+                </a:solidFill>
+              </a:rPr>
+              <a:t>"Quem dá suporte no seu SAC hoje? Muitas empresas têm o ambiente implantado mas sem ninguém para evoluir e sustentar. Banco de horas resolve isso sem contratar."</a:t>
+            </a:r>
+          </a:p>
+        </p:txBody>
+      </p:sp>
+      <p:sp>
+        <p:nvSpPr>
+          <p:cNvPr id="12" name="Rectangle 11"/>
+          <p:cNvSpPr/>
+          <p:nvPr/>
+        </p:nvSpPr>
+        <p:spPr>
+          <a:xfrm>
+            <a:off x="6217920" y="1005840"/>
+            <a:ext cx="5486400" cy="2743200"/>
+          </a:xfrm>
+          <a:prstGeom prst="rect">
+            <a:avLst/>
+          </a:prstGeom>
+          <a:solidFill>
+            <a:srgbClr val="E8F0FE"/>
+          </a:solidFill>
+          <a:ln>
+            <a:noFill/>
+          </a:ln>
+        </p:spPr>
+        <p:style>
+          <a:lnRef idx="1">
+            <a:schemeClr val="accent1"/>
+          </a:lnRef>
+          <a:fillRef idx="3">
+            <a:schemeClr val="accent1"/>
+          </a:fillRef>
+          <a:effectRef idx="2">
+            <a:schemeClr val="accent1"/>
+          </a:effectRef>
+          <a:fontRef idx="minor">
+            <a:schemeClr val="lt1"/>
+          </a:fontRef>
+        </p:style>
+        <p:txBody>
+          <a:bodyPr rtlCol="0" anchor="ctr"/>
+          <a:lstStyle/>
+          <a:p>
+            <a:pPr algn="ctr"/>
+          </a:p>
+        </p:txBody>
+      </p:sp>
+      <p:sp>
+        <p:nvSpPr>
+          <p:cNvPr id="13" name="Rectangle 12"/>
+          <p:cNvSpPr/>
+          <p:nvPr/>
+        </p:nvSpPr>
+        <p:spPr>
+          <a:xfrm>
+            <a:off x="6217920" y="1005840"/>
+            <a:ext cx="640080" cy="2743200"/>
           </a:xfrm>
           <a:prstGeom prst="rect">
             <a:avLst/>
@@ -6378,13 +6498,124 @@
       </p:sp>
       <p:sp>
         <p:nvSpPr>
-          <p:cNvPr id="11" name="TextBox 10"/>
-          <p:cNvSpPr txBox="1"/>
-          <p:nvPr/>
-        </p:nvSpPr>
-        <p:spPr>
-          <a:xfrm>
-            <a:off x="1143000" y="1783080"/>
+          <p:cNvPr id="14" name="TextBox 13"/>
+          <p:cNvSpPr txBox="1"/>
+          <p:nvPr/>
+        </p:nvSpPr>
+        <p:spPr>
+          <a:xfrm>
+            <a:off x="6217920" y="2011680"/>
+            <a:ext cx="640080" cy="548640"/>
+          </a:xfrm>
+          <a:prstGeom prst="rect">
+            <a:avLst/>
+          </a:prstGeom>
+          <a:noFill/>
+        </p:spPr>
+        <p:txBody>
+          <a:bodyPr wrap="square">
+            <a:spAutoFit/>
+          </a:bodyPr>
+          <a:lstStyle/>
+          <a:p>
+            <a:pPr algn="ctr"/>
+            <a:r>
+              <a:rPr sz="2000" b="1" i="0">
+                <a:solidFill>
+                  <a:srgbClr val="002F6C"/>
+                </a:solidFill>
+              </a:rPr>
+              <a:t>02</a:t>
+            </a:r>
+          </a:p>
+        </p:txBody>
+      </p:sp>
+      <p:sp>
+        <p:nvSpPr>
+          <p:cNvPr id="15" name="TextBox 14"/>
+          <p:cNvSpPr txBox="1"/>
+          <p:nvPr/>
+        </p:nvSpPr>
+        <p:spPr>
+          <a:xfrm>
+            <a:off x="6995159" y="1115568"/>
+            <a:ext cx="4572000" cy="502920"/>
+          </a:xfrm>
+          <a:prstGeom prst="rect">
+            <a:avLst/>
+          </a:prstGeom>
+          <a:noFill/>
+        </p:spPr>
+        <p:txBody>
+          <a:bodyPr wrap="square">
+            <a:spAutoFit/>
+          </a:bodyPr>
+          <a:lstStyle/>
+          <a:p>
+            <a:pPr algn="l"/>
+            <a:r>
+              <a:rPr sz="1400" b="1" i="0">
+                <a:solidFill>
+                  <a:srgbClr val="002F6C"/>
+                </a:solidFill>
+              </a:rPr>
+              <a:t>SAC parado, sem suporte</a:t>
+            </a:r>
+          </a:p>
+        </p:txBody>
+      </p:sp>
+      <p:sp>
+        <p:nvSpPr>
+          <p:cNvPr id="16" name="Rectangle 15"/>
+          <p:cNvSpPr/>
+          <p:nvPr/>
+        </p:nvSpPr>
+        <p:spPr>
+          <a:xfrm>
+            <a:off x="6995159" y="1645920"/>
+            <a:ext cx="4572000" cy="45720"/>
+          </a:xfrm>
+          <a:prstGeom prst="rect">
+            <a:avLst/>
+          </a:prstGeom>
+          <a:solidFill>
+            <a:srgbClr val="F5A800"/>
+          </a:solidFill>
+          <a:ln>
+            <a:noFill/>
+          </a:ln>
+        </p:spPr>
+        <p:style>
+          <a:lnRef idx="1">
+            <a:schemeClr val="accent1"/>
+          </a:lnRef>
+          <a:fillRef idx="3">
+            <a:schemeClr val="accent1"/>
+          </a:fillRef>
+          <a:effectRef idx="2">
+            <a:schemeClr val="accent1"/>
+          </a:effectRef>
+          <a:fontRef idx="minor">
+            <a:schemeClr val="lt1"/>
+          </a:fontRef>
+        </p:style>
+        <p:txBody>
+          <a:bodyPr rtlCol="0" anchor="ctr"/>
+          <a:lstStyle/>
+          <a:p>
+            <a:pPr algn="ctr"/>
+          </a:p>
+        </p:txBody>
+      </p:sp>
+      <p:sp>
+        <p:nvSpPr>
+          <p:cNvPr id="17" name="TextBox 16"/>
+          <p:cNvSpPr txBox="1"/>
+          <p:nvPr/>
+        </p:nvSpPr>
+        <p:spPr>
+          <a:xfrm>
+            <a:off x="6995159" y="1783080"/>
             <a:ext cx="4572000" cy="1737360"/>
           </a:xfrm>
           <a:prstGeom prst="rect">
@@ -6405,20 +6636,20 @@
                   <a:srgbClr val="444444"/>
                 </a:solidFill>
               </a:rPr>
-              <a:t>"Você já tem o SAC contratado. Nós colocamos ele pra trabalhar — sem aumentar sua equipe, sem projeto de meses."</a:t>
-            </a:r>
-          </a:p>
-        </p:txBody>
-      </p:sp>
-      <p:sp>
-        <p:nvSpPr>
-          <p:cNvPr id="12" name="Rectangle 11"/>
+              <a:t>"Não é falta de ferramenta — é falta de suporte para ativar e manter. A Solveplan entra, coloca no ar e sustenta o ambiente sem projeto de meses."</a:t>
+            </a:r>
+          </a:p>
+        </p:txBody>
+      </p:sp>
+      <p:sp>
+        <p:nvSpPr>
+          <p:cNvPr id="18" name="Rectangle 17"/>
           <p:cNvSpPr/>
           <p:nvPr/>
         </p:nvSpPr>
         <p:spPr>
           <a:xfrm>
-            <a:off x="6217920" y="1005840"/>
+            <a:off x="365760" y="3657600"/>
             <a:ext cx="5486400" cy="2743200"/>
           </a:xfrm>
           <a:prstGeom prst="rect">
@@ -6455,13 +6686,13 @@
       </p:sp>
       <p:sp>
         <p:nvSpPr>
-          <p:cNvPr id="13" name="Rectangle 12"/>
+          <p:cNvPr id="19" name="Rectangle 18"/>
           <p:cNvSpPr/>
           <p:nvPr/>
         </p:nvSpPr>
         <p:spPr>
           <a:xfrm>
-            <a:off x="6217920" y="1005840"/>
+            <a:off x="365760" y="3657600"/>
             <a:ext cx="640080" cy="2743200"/>
           </a:xfrm>
           <a:prstGeom prst="rect">
@@ -6498,13 +6729,13 @@
       </p:sp>
       <p:sp>
         <p:nvSpPr>
-          <p:cNvPr id="14" name="TextBox 13"/>
-          <p:cNvSpPr txBox="1"/>
-          <p:nvPr/>
-        </p:nvSpPr>
-        <p:spPr>
-          <a:xfrm>
-            <a:off x="6217920" y="2011680"/>
+          <p:cNvPr id="20" name="TextBox 19"/>
+          <p:cNvSpPr txBox="1"/>
+          <p:nvPr/>
+        </p:nvSpPr>
+        <p:spPr>
+          <a:xfrm>
+            <a:off x="365760" y="4663440"/>
             <a:ext cx="640080" cy="548640"/>
           </a:xfrm>
           <a:prstGeom prst="rect">
@@ -6525,20 +6756,20 @@
                   <a:srgbClr val="FFFFFF"/>
                 </a:solidFill>
               </a:rPr>
-              <a:t>02</a:t>
-            </a:r>
-          </a:p>
-        </p:txBody>
-      </p:sp>
-      <p:sp>
-        <p:nvSpPr>
-          <p:cNvPr id="15" name="TextBox 14"/>
-          <p:cNvSpPr txBox="1"/>
-          <p:nvPr/>
-        </p:nvSpPr>
-        <p:spPr>
-          <a:xfrm>
-            <a:off x="6995159" y="1115568"/>
+              <a:t>03</a:t>
+            </a:r>
+          </a:p>
+        </p:txBody>
+      </p:sp>
+      <p:sp>
+        <p:nvSpPr>
+          <p:cNvPr id="21" name="TextBox 20"/>
+          <p:cNvSpPr txBox="1"/>
+          <p:nvPr/>
+        </p:nvSpPr>
+        <p:spPr>
+          <a:xfrm>
+            <a:off x="1143000" y="3767328"/>
             <a:ext cx="4572000" cy="502920"/>
           </a:xfrm>
           <a:prstGeom prst="rect">
@@ -6566,13 +6797,13 @@
       </p:sp>
       <p:sp>
         <p:nvSpPr>
-          <p:cNvPr id="16" name="Rectangle 15"/>
+          <p:cNvPr id="22" name="Rectangle 21"/>
           <p:cNvSpPr/>
           <p:nvPr/>
         </p:nvSpPr>
         <p:spPr>
           <a:xfrm>
-            <a:off x="6995159" y="1645920"/>
+            <a:off x="1143000" y="4297680"/>
             <a:ext cx="4572000" cy="45720"/>
           </a:xfrm>
           <a:prstGeom prst="rect">
@@ -6609,13 +6840,13 @@
       </p:sp>
       <p:sp>
         <p:nvSpPr>
-          <p:cNvPr id="17" name="TextBox 16"/>
-          <p:cNvSpPr txBox="1"/>
-          <p:nvPr/>
-        </p:nvSpPr>
-        <p:spPr>
-          <a:xfrm>
-            <a:off x="6995159" y="1783080"/>
+          <p:cNvPr id="23" name="TextBox 22"/>
+          <p:cNvSpPr txBox="1"/>
+          <p:nvPr/>
+        </p:nvSpPr>
+        <p:spPr>
+          <a:xfrm>
+            <a:off x="1143000" y="4434840"/>
             <a:ext cx="4572000" cy="1737360"/>
           </a:xfrm>
           <a:prstGeom prst="rect">
@@ -6636,20 +6867,20 @@
                   <a:srgbClr val="444444"/>
                 </a:solidFill>
               </a:rPr>
-              <a:t>"A SAP vai bloquear suas extrações via RFC. Existe uma rota de transição que não exige reescrever tudo do zero."</a:t>
-            </a:r>
-          </a:p>
-        </p:txBody>
-      </p:sp>
-      <p:sp>
-        <p:nvSpPr>
-          <p:cNvPr id="18" name="Rectangle 17"/>
+              <a:t>"A SAP vai bloquear suas extrações via RFC. Com suporte especializado, existe uma rota de transição que não exige reescrever tudo do zero."</a:t>
+            </a:r>
+          </a:p>
+        </p:txBody>
+      </p:sp>
+      <p:sp>
+        <p:nvSpPr>
+          <p:cNvPr id="24" name="Rectangle 23"/>
           <p:cNvSpPr/>
           <p:nvPr/>
         </p:nvSpPr>
         <p:spPr>
           <a:xfrm>
-            <a:off x="365760" y="3657600"/>
+            <a:off x="6217920" y="3657600"/>
             <a:ext cx="5486400" cy="2743200"/>
           </a:xfrm>
           <a:prstGeom prst="rect">
@@ -6686,13 +6917,13 @@
       </p:sp>
       <p:sp>
         <p:nvSpPr>
-          <p:cNvPr id="19" name="Rectangle 18"/>
+          <p:cNvPr id="25" name="Rectangle 24"/>
           <p:cNvSpPr/>
           <p:nvPr/>
         </p:nvSpPr>
         <p:spPr>
           <a:xfrm>
-            <a:off x="365760" y="3657600"/>
+            <a:off x="6217920" y="3657600"/>
             <a:ext cx="640080" cy="2743200"/>
           </a:xfrm>
           <a:prstGeom prst="rect">
@@ -6729,13 +6960,13 @@
       </p:sp>
       <p:sp>
         <p:nvSpPr>
-          <p:cNvPr id="20" name="TextBox 19"/>
-          <p:cNvSpPr txBox="1"/>
-          <p:nvPr/>
-        </p:nvSpPr>
-        <p:spPr>
-          <a:xfrm>
-            <a:off x="365760" y="4663440"/>
+          <p:cNvPr id="26" name="TextBox 25"/>
+          <p:cNvSpPr txBox="1"/>
+          <p:nvPr/>
+        </p:nvSpPr>
+        <p:spPr>
+          <a:xfrm>
+            <a:off x="6217920" y="4663440"/>
             <a:ext cx="640080" cy="548640"/>
           </a:xfrm>
           <a:prstGeom prst="rect">
@@ -6756,20 +6987,20 @@
                   <a:srgbClr val="FFFFFF"/>
                 </a:solidFill>
               </a:rPr>
-              <a:t>03</a:t>
-            </a:r>
-          </a:p>
-        </p:txBody>
-      </p:sp>
-      <p:sp>
-        <p:nvSpPr>
-          <p:cNvPr id="21" name="TextBox 20"/>
-          <p:cNvSpPr txBox="1"/>
-          <p:nvPr/>
-        </p:nvSpPr>
-        <p:spPr>
-          <a:xfrm>
-            <a:off x="1143000" y="3767328"/>
+              <a:t>04</a:t>
+            </a:r>
+          </a:p>
+        </p:txBody>
+      </p:sp>
+      <p:sp>
+        <p:nvSpPr>
+          <p:cNvPr id="27" name="TextBox 26"/>
+          <p:cNvSpPr txBox="1"/>
+          <p:nvPr/>
+        </p:nvSpPr>
+        <p:spPr>
+          <a:xfrm>
+            <a:off x="6995159" y="3767328"/>
             <a:ext cx="4572000" cy="502920"/>
           </a:xfrm>
           <a:prstGeom prst="rect">
@@ -6797,13 +7028,13 @@
       </p:sp>
       <p:sp>
         <p:nvSpPr>
-          <p:cNvPr id="22" name="Rectangle 21"/>
+          <p:cNvPr id="28" name="Rectangle 27"/>
           <p:cNvSpPr/>
           <p:nvPr/>
         </p:nvSpPr>
         <p:spPr>
           <a:xfrm>
-            <a:off x="1143000" y="4297680"/>
+            <a:off x="6995159" y="4297680"/>
             <a:ext cx="4572000" cy="45720"/>
           </a:xfrm>
           <a:prstGeom prst="rect">
@@ -6840,237 +7071,6 @@
       </p:sp>
       <p:sp>
         <p:nvSpPr>
-          <p:cNvPr id="23" name="TextBox 22"/>
-          <p:cNvSpPr txBox="1"/>
-          <p:nvPr/>
-        </p:nvSpPr>
-        <p:spPr>
-          <a:xfrm>
-            <a:off x="1143000" y="4434840"/>
-            <a:ext cx="4572000" cy="1737360"/>
-          </a:xfrm>
-          <a:prstGeom prst="rect">
-            <a:avLst/>
-          </a:prstGeom>
-          <a:noFill/>
-        </p:spPr>
-        <p:txBody>
-          <a:bodyPr wrap="square">
-            <a:spAutoFit/>
-          </a:bodyPr>
-          <a:lstStyle/>
-          <a:p>
-            <a:pPr algn="l"/>
-            <a:r>
-              <a:rPr sz="1100" b="0" i="1">
-                <a:solidFill>
-                  <a:srgbClr val="444444"/>
-                </a:solidFill>
-              </a:rPr>
-              <a:t>"Seu S4 não é para relatórios. Cada query analítica no transacional consome memória e vai aparecer na sua fatura."</a:t>
-            </a:r>
-          </a:p>
-        </p:txBody>
-      </p:sp>
-      <p:sp>
-        <p:nvSpPr>
-          <p:cNvPr id="24" name="Rectangle 23"/>
-          <p:cNvSpPr/>
-          <p:nvPr/>
-        </p:nvSpPr>
-        <p:spPr>
-          <a:xfrm>
-            <a:off x="6217920" y="3657600"/>
-            <a:ext cx="5486400" cy="2743200"/>
-          </a:xfrm>
-          <a:prstGeom prst="rect">
-            <a:avLst/>
-          </a:prstGeom>
-          <a:solidFill>
-            <a:srgbClr val="E8F0FE"/>
-          </a:solidFill>
-          <a:ln>
-            <a:noFill/>
-          </a:ln>
-        </p:spPr>
-        <p:style>
-          <a:lnRef idx="1">
-            <a:schemeClr val="accent1"/>
-          </a:lnRef>
-          <a:fillRef idx="3">
-            <a:schemeClr val="accent1"/>
-          </a:fillRef>
-          <a:effectRef idx="2">
-            <a:schemeClr val="accent1"/>
-          </a:effectRef>
-          <a:fontRef idx="minor">
-            <a:schemeClr val="lt1"/>
-          </a:fontRef>
-        </p:style>
-        <p:txBody>
-          <a:bodyPr rtlCol="0" anchor="ctr"/>
-          <a:lstStyle/>
-          <a:p>
-            <a:pPr algn="ctr"/>
-          </a:p>
-        </p:txBody>
-      </p:sp>
-      <p:sp>
-        <p:nvSpPr>
-          <p:cNvPr id="25" name="Rectangle 24"/>
-          <p:cNvSpPr/>
-          <p:nvPr/>
-        </p:nvSpPr>
-        <p:spPr>
-          <a:xfrm>
-            <a:off x="6217920" y="3657600"/>
-            <a:ext cx="640080" cy="2743200"/>
-          </a:xfrm>
-          <a:prstGeom prst="rect">
-            <a:avLst/>
-          </a:prstGeom>
-          <a:solidFill>
-            <a:srgbClr val="1A7A4A"/>
-          </a:solidFill>
-          <a:ln>
-            <a:noFill/>
-          </a:ln>
-        </p:spPr>
-        <p:style>
-          <a:lnRef idx="1">
-            <a:schemeClr val="accent1"/>
-          </a:lnRef>
-          <a:fillRef idx="3">
-            <a:schemeClr val="accent1"/>
-          </a:fillRef>
-          <a:effectRef idx="2">
-            <a:schemeClr val="accent1"/>
-          </a:effectRef>
-          <a:fontRef idx="minor">
-            <a:schemeClr val="lt1"/>
-          </a:fontRef>
-        </p:style>
-        <p:txBody>
-          <a:bodyPr rtlCol="0" anchor="ctr"/>
-          <a:lstStyle/>
-          <a:p>
-            <a:pPr algn="ctr"/>
-          </a:p>
-        </p:txBody>
-      </p:sp>
-      <p:sp>
-        <p:nvSpPr>
-          <p:cNvPr id="26" name="TextBox 25"/>
-          <p:cNvSpPr txBox="1"/>
-          <p:nvPr/>
-        </p:nvSpPr>
-        <p:spPr>
-          <a:xfrm>
-            <a:off x="6217920" y="4663440"/>
-            <a:ext cx="640080" cy="548640"/>
-          </a:xfrm>
-          <a:prstGeom prst="rect">
-            <a:avLst/>
-          </a:prstGeom>
-          <a:noFill/>
-        </p:spPr>
-        <p:txBody>
-          <a:bodyPr wrap="square">
-            <a:spAutoFit/>
-          </a:bodyPr>
-          <a:lstStyle/>
-          <a:p>
-            <a:pPr algn="ctr"/>
-            <a:r>
-              <a:rPr sz="2000" b="1" i="0">
-                <a:solidFill>
-                  <a:srgbClr val="FFFFFF"/>
-                </a:solidFill>
-              </a:rPr>
-              <a:t>04</a:t>
-            </a:r>
-          </a:p>
-        </p:txBody>
-      </p:sp>
-      <p:sp>
-        <p:nvSpPr>
-          <p:cNvPr id="27" name="TextBox 26"/>
-          <p:cNvSpPr txBox="1"/>
-          <p:nvPr/>
-        </p:nvSpPr>
-        <p:spPr>
-          <a:xfrm>
-            <a:off x="6995159" y="3767328"/>
-            <a:ext cx="4572000" cy="502920"/>
-          </a:xfrm>
-          <a:prstGeom prst="rect">
-            <a:avLst/>
-          </a:prstGeom>
-          <a:noFill/>
-        </p:spPr>
-        <p:txBody>
-          <a:bodyPr wrap="square">
-            <a:spAutoFit/>
-          </a:bodyPr>
-          <a:lstStyle/>
-          <a:p>
-            <a:pPr algn="l"/>
-            <a:r>
-              <a:rPr sz="1400" b="1" i="0">
-                <a:solidFill>
-                  <a:srgbClr val="002F6C"/>
-                </a:solidFill>
-              </a:rPr>
-              <a:t>Capacidade Técnica</a:t>
-            </a:r>
-          </a:p>
-        </p:txBody>
-      </p:sp>
-      <p:sp>
-        <p:nvSpPr>
-          <p:cNvPr id="28" name="Rectangle 27"/>
-          <p:cNvSpPr/>
-          <p:nvPr/>
-        </p:nvSpPr>
-        <p:spPr>
-          <a:xfrm>
-            <a:off x="6995159" y="4297680"/>
-            <a:ext cx="4572000" cy="45720"/>
-          </a:xfrm>
-          <a:prstGeom prst="rect">
-            <a:avLst/>
-          </a:prstGeom>
-          <a:solidFill>
-            <a:srgbClr val="1A7A4A"/>
-          </a:solidFill>
-          <a:ln>
-            <a:noFill/>
-          </a:ln>
-        </p:spPr>
-        <p:style>
-          <a:lnRef idx="1">
-            <a:schemeClr val="accent1"/>
-          </a:lnRef>
-          <a:fillRef idx="3">
-            <a:schemeClr val="accent1"/>
-          </a:fillRef>
-          <a:effectRef idx="2">
-            <a:schemeClr val="accent1"/>
-          </a:effectRef>
-          <a:fontRef idx="minor">
-            <a:schemeClr val="lt1"/>
-          </a:fontRef>
-        </p:style>
-        <p:txBody>
-          <a:bodyPr rtlCol="0" anchor="ctr"/>
-          <a:lstStyle/>
-          <a:p>
-            <a:pPr algn="ctr"/>
-          </a:p>
-        </p:txBody>
-      </p:sp>
-      <p:sp>
-        <p:nvSpPr>
           <p:cNvPr id="29" name="TextBox 28"/>
           <p:cNvSpPr txBox="1"/>
           <p:nvPr/>
@@ -7098,7 +7098,7 @@
                   <a:srgbClr val="444444"/>
                 </a:solidFill>
               </a:rPr>
-              <a:t>"Evolua seu SAC sem depender do time interno. Banco de horas, por demanda, com especialistas em +150 empresas SAP."</a:t>
+              <a:t>"Seu S4 não é para relatórios. Com suporte técnico certo, você move isso para a camada analítica correta — sem projeto interno, por demanda."</a:t>
             </a:r>
           </a:p>
         </p:txBody>
@@ -12459,7 +12459,7 @@
                   <a:srgbClr val="444444"/>
                 </a:solidFill>
               </a:rPr>
-              <a:t>Email RFC (3 emails)</a:t>
+              <a:t>Email sem parceiro (3 emails)</a:t>
             </a:r>
           </a:p>
         </p:txBody>
@@ -12604,7 +12604,7 @@
                   <a:srgbClr val="444444"/>
                 </a:solidFill>
               </a:rPr>
-              <a:t>Email SAC parado (3 emails)</a:t>
+              <a:t>Email RFC urgência (3 emails)</a:t>
             </a:r>
           </a:p>
         </p:txBody>
@@ -12749,7 +12749,7 @@
                   <a:srgbClr val="444444"/>
                 </a:solidFill>
               </a:rPr>
-              <a:t>4 posts LinkedIn</a:t>
+              <a:t>Email SAC parado (3 emails)</a:t>
             </a:r>
           </a:p>
         </p:txBody>
@@ -12783,7 +12783,7 @@
                   <a:srgbClr val="444444"/>
                 </a:solidFill>
               </a:rPr>
-              <a:t>LinkedIn orgânico</a:t>
+              <a:t>Email marketing</a:t>
             </a:r>
           </a:p>
         </p:txBody>
@@ -12817,7 +12817,7 @@
                   <a:srgbClr val="002F6C"/>
                 </a:solidFill>
               </a:rPr>
-              <a:t>/post-social</a:t>
+              <a:t>/material-campanha</a:t>
             </a:r>
           </a:p>
         </p:txBody>
@@ -12894,7 +12894,7 @@
                   <a:srgbClr val="444444"/>
                 </a:solidFill>
               </a:rPr>
-              <a:t>Banners LinkedIn Ads (3 var)</a:t>
+              <a:t>4 posts LinkedIn</a:t>
             </a:r>
           </a:p>
         </p:txBody>
@@ -12928,7 +12928,7 @@
                   <a:srgbClr val="444444"/>
                 </a:solidFill>
               </a:rPr>
-              <a:t>LinkedIn Ads</a:t>
+              <a:t>LinkedIn orgânico</a:t>
             </a:r>
           </a:p>
         </p:txBody>
@@ -12962,7 +12962,7 @@
                   <a:srgbClr val="002F6C"/>
                 </a:solidFill>
               </a:rPr>
-              <a:t>/anuncio</a:t>
+              <a:t>/post-social</a:t>
             </a:r>
           </a:p>
         </p:txBody>
@@ -13039,7 +13039,7 @@
                   <a:srgbClr val="444444"/>
                 </a:solidFill>
               </a:rPr>
-              <a:t>Landing page diagnóstico</a:t>
+              <a:t>Banners LinkedIn Ads (3 var)</a:t>
             </a:r>
           </a:p>
         </p:txBody>
@@ -13073,7 +13073,7 @@
                   <a:srgbClr val="444444"/>
                 </a:solidFill>
               </a:rPr>
-              <a:t>Paid + orgânico</a:t>
+              <a:t>LinkedIn Ads</a:t>
             </a:r>
           </a:p>
         </p:txBody>
@@ -13107,7 +13107,7 @@
                   <a:srgbClr val="002F6C"/>
                 </a:solidFill>
               </a:rPr>
-              <a:t>/material-campanha</a:t>
+              <a:t>/anuncio</a:t>
             </a:r>
           </a:p>
         </p:txBody>
@@ -13184,7 +13184,7 @@
                   <a:srgbClr val="444444"/>
                 </a:solidFill>
               </a:rPr>
-              <a:t>Artigo RFC bloqueado</a:t>
+              <a:t>Landing page suporte SAC</a:t>
             </a:r>
           </a:p>
         </p:txBody>
@@ -13218,7 +13218,7 @@
                   <a:srgbClr val="444444"/>
                 </a:solidFill>
               </a:rPr>
-              <a:t>Blog / SEO</a:t>
+              <a:t>Paid + orgânico</a:t>
             </a:r>
           </a:p>
         </p:txBody>
@@ -13252,7 +13252,7 @@
                   <a:srgbClr val="002F6C"/>
                 </a:solidFill>
               </a:rPr>
-              <a:t>/artigo-blog</a:t>
+              <a:t>/material-campanha</a:t>
             </a:r>
           </a:p>
         </p:txBody>
@@ -13329,7 +13329,7 @@
                   <a:srgbClr val="444444"/>
                 </a:solidFill>
               </a:rPr>
-              <a:t>Artigo SAC parado</a:t>
+              <a:t>Artigo RFC bloqueado</a:t>
             </a:r>
           </a:p>
         </p:txBody>
@@ -13474,7 +13474,7 @@
                   <a:srgbClr val="444444"/>
                 </a:solidFill>
               </a:rPr>
-              <a:t>Copy Google Ads</a:t>
+              <a:t>Artigo quem sustenta seu SAC</a:t>
             </a:r>
           </a:p>
         </p:txBody>
@@ -13508,6 +13508,151 @@
                   <a:srgbClr val="444444"/>
                 </a:solidFill>
               </a:rPr>
+              <a:t>Blog / SEO</a:t>
+            </a:r>
+          </a:p>
+        </p:txBody>
+      </p:sp>
+      <p:sp>
+        <p:nvSpPr>
+          <p:cNvPr id="59" name="TextBox 58"/>
+          <p:cNvSpPr txBox="1"/>
+          <p:nvPr/>
+        </p:nvSpPr>
+        <p:spPr>
+          <a:xfrm>
+            <a:off x="10698480" y="4773168"/>
+            <a:ext cx="1371600" cy="292608"/>
+          </a:xfrm>
+          <a:prstGeom prst="rect">
+            <a:avLst/>
+          </a:prstGeom>
+          <a:noFill/>
+        </p:spPr>
+        <p:txBody>
+          <a:bodyPr wrap="square">
+            <a:spAutoFit/>
+          </a:bodyPr>
+          <a:lstStyle/>
+          <a:p>
+            <a:pPr algn="l"/>
+            <a:r>
+              <a:rPr sz="900" b="1" i="0">
+                <a:solidFill>
+                  <a:srgbClr val="002F6C"/>
+                </a:solidFill>
+              </a:rPr>
+              <a:t>/artigo-blog</a:t>
+            </a:r>
+          </a:p>
+        </p:txBody>
+      </p:sp>
+      <p:sp>
+        <p:nvSpPr>
+          <p:cNvPr id="60" name="Rectangle 59"/>
+          <p:cNvSpPr/>
+          <p:nvPr/>
+        </p:nvSpPr>
+        <p:spPr>
+          <a:xfrm>
+            <a:off x="6583680" y="5129784"/>
+            <a:ext cx="5486400" cy="384048"/>
+          </a:xfrm>
+          <a:prstGeom prst="rect">
+            <a:avLst/>
+          </a:prstGeom>
+          <a:solidFill>
+            <a:srgbClr val="F4F4F4"/>
+          </a:solidFill>
+          <a:ln>
+            <a:noFill/>
+          </a:ln>
+        </p:spPr>
+        <p:style>
+          <a:lnRef idx="1">
+            <a:schemeClr val="accent1"/>
+          </a:lnRef>
+          <a:fillRef idx="3">
+            <a:schemeClr val="accent1"/>
+          </a:fillRef>
+          <a:effectRef idx="2">
+            <a:schemeClr val="accent1"/>
+          </a:effectRef>
+          <a:fontRef idx="minor">
+            <a:schemeClr val="lt1"/>
+          </a:fontRef>
+        </p:style>
+        <p:txBody>
+          <a:bodyPr rtlCol="0" anchor="ctr"/>
+          <a:lstStyle/>
+          <a:p>
+            <a:pPr algn="ctr"/>
+          </a:p>
+        </p:txBody>
+      </p:sp>
+      <p:sp>
+        <p:nvSpPr>
+          <p:cNvPr id="61" name="TextBox 60"/>
+          <p:cNvSpPr txBox="1"/>
+          <p:nvPr/>
+        </p:nvSpPr>
+        <p:spPr>
+          <a:xfrm>
+            <a:off x="6675120" y="5175504"/>
+            <a:ext cx="2286000" cy="292608"/>
+          </a:xfrm>
+          <a:prstGeom prst="rect">
+            <a:avLst/>
+          </a:prstGeom>
+          <a:noFill/>
+        </p:spPr>
+        <p:txBody>
+          <a:bodyPr wrap="square">
+            <a:spAutoFit/>
+          </a:bodyPr>
+          <a:lstStyle/>
+          <a:p>
+            <a:pPr algn="l"/>
+            <a:r>
+              <a:rPr sz="900" b="0" i="0">
+                <a:solidFill>
+                  <a:srgbClr val="444444"/>
+                </a:solidFill>
+              </a:rPr>
+              <a:t>Copy Google Ads</a:t>
+            </a:r>
+          </a:p>
+        </p:txBody>
+      </p:sp>
+      <p:sp>
+        <p:nvSpPr>
+          <p:cNvPr id="62" name="TextBox 61"/>
+          <p:cNvSpPr txBox="1"/>
+          <p:nvPr/>
+        </p:nvSpPr>
+        <p:spPr>
+          <a:xfrm>
+            <a:off x="9052560" y="5175504"/>
+            <a:ext cx="1554480" cy="292608"/>
+          </a:xfrm>
+          <a:prstGeom prst="rect">
+            <a:avLst/>
+          </a:prstGeom>
+          <a:noFill/>
+        </p:spPr>
+        <p:txBody>
+          <a:bodyPr wrap="square">
+            <a:spAutoFit/>
+          </a:bodyPr>
+          <a:lstStyle/>
+          <a:p>
+            <a:pPr algn="l"/>
+            <a:r>
+              <a:rPr sz="900" b="0" i="0">
+                <a:solidFill>
+                  <a:srgbClr val="444444"/>
+                </a:solidFill>
+              </a:rPr>
               <a:t>Google Ads</a:t>
             </a:r>
           </a:p>
@@ -13515,13 +13660,13 @@
       </p:sp>
       <p:sp>
         <p:nvSpPr>
-          <p:cNvPr id="59" name="TextBox 58"/>
-          <p:cNvSpPr txBox="1"/>
-          <p:nvPr/>
-        </p:nvSpPr>
-        <p:spPr>
-          <a:xfrm>
-            <a:off x="10698480" y="4773168"/>
+          <p:cNvPr id="63" name="TextBox 62"/>
+          <p:cNvSpPr txBox="1"/>
+          <p:nvPr/>
+        </p:nvSpPr>
+        <p:spPr>
+          <a:xfrm>
+            <a:off x="10698480" y="5175504"/>
             <a:ext cx="1371600" cy="292608"/>
           </a:xfrm>
           <a:prstGeom prst="rect">
@@ -14457,7 +14602,7 @@
                   <a:srgbClr val="FFFFFF"/>
                 </a:solidFill>
               </a:rPr>
-              <a:t>Criar landing page: diagnóstico gratuito 30 min do seu ambiente SAC</a:t>
+              <a:t>Criar landing page: fale com especialista em suporte SAC/Datasphere — 30 min</a:t>
             </a:r>
           </a:p>
         </p:txBody>
